--- a/SwRebellionEditor/swr-25th-anniv-patch.pptx
+++ b/SwRebellionEditor/swr-25th-anniv-patch.pptx
@@ -260,7 +260,7 @@
           <a:p>
             <a:fld id="{92FCFB53-3C4F-4D81-A8C1-A108D130D14A}" type="datetimeFigureOut">
               <a:rPr lang="fr-FR" smtClean="0"/>
-              <a:t>08/01/2025</a:t>
+              <a:t>01/04/2026</a:t>
             </a:fld>
             <a:endParaRPr lang="fr-FR"/>
           </a:p>
@@ -458,7 +458,7 @@
           <a:p>
             <a:fld id="{92FCFB53-3C4F-4D81-A8C1-A108D130D14A}" type="datetimeFigureOut">
               <a:rPr lang="fr-FR" smtClean="0"/>
-              <a:t>08/01/2025</a:t>
+              <a:t>01/04/2026</a:t>
             </a:fld>
             <a:endParaRPr lang="fr-FR"/>
           </a:p>
@@ -666,7 +666,7 @@
           <a:p>
             <a:fld id="{92FCFB53-3C4F-4D81-A8C1-A108D130D14A}" type="datetimeFigureOut">
               <a:rPr lang="fr-FR" smtClean="0"/>
-              <a:t>08/01/2025</a:t>
+              <a:t>01/04/2026</a:t>
             </a:fld>
             <a:endParaRPr lang="fr-FR"/>
           </a:p>
@@ -864,7 +864,7 @@
           <a:p>
             <a:fld id="{92FCFB53-3C4F-4D81-A8C1-A108D130D14A}" type="datetimeFigureOut">
               <a:rPr lang="fr-FR" smtClean="0"/>
-              <a:t>08/01/2025</a:t>
+              <a:t>01/04/2026</a:t>
             </a:fld>
             <a:endParaRPr lang="fr-FR"/>
           </a:p>
@@ -1139,7 +1139,7 @@
           <a:p>
             <a:fld id="{92FCFB53-3C4F-4D81-A8C1-A108D130D14A}" type="datetimeFigureOut">
               <a:rPr lang="fr-FR" smtClean="0"/>
-              <a:t>08/01/2025</a:t>
+              <a:t>01/04/2026</a:t>
             </a:fld>
             <a:endParaRPr lang="fr-FR"/>
           </a:p>
@@ -1404,7 +1404,7 @@
           <a:p>
             <a:fld id="{92FCFB53-3C4F-4D81-A8C1-A108D130D14A}" type="datetimeFigureOut">
               <a:rPr lang="fr-FR" smtClean="0"/>
-              <a:t>08/01/2025</a:t>
+              <a:t>01/04/2026</a:t>
             </a:fld>
             <a:endParaRPr lang="fr-FR"/>
           </a:p>
@@ -1816,7 +1816,7 @@
           <a:p>
             <a:fld id="{92FCFB53-3C4F-4D81-A8C1-A108D130D14A}" type="datetimeFigureOut">
               <a:rPr lang="fr-FR" smtClean="0"/>
-              <a:t>08/01/2025</a:t>
+              <a:t>01/04/2026</a:t>
             </a:fld>
             <a:endParaRPr lang="fr-FR"/>
           </a:p>
@@ -1957,7 +1957,7 @@
           <a:p>
             <a:fld id="{92FCFB53-3C4F-4D81-A8C1-A108D130D14A}" type="datetimeFigureOut">
               <a:rPr lang="fr-FR" smtClean="0"/>
-              <a:t>08/01/2025</a:t>
+              <a:t>01/04/2026</a:t>
             </a:fld>
             <a:endParaRPr lang="fr-FR"/>
           </a:p>
@@ -2070,7 +2070,7 @@
           <a:p>
             <a:fld id="{92FCFB53-3C4F-4D81-A8C1-A108D130D14A}" type="datetimeFigureOut">
               <a:rPr lang="fr-FR" smtClean="0"/>
-              <a:t>08/01/2025</a:t>
+              <a:t>01/04/2026</a:t>
             </a:fld>
             <a:endParaRPr lang="fr-FR"/>
           </a:p>
@@ -2381,7 +2381,7 @@
           <a:p>
             <a:fld id="{92FCFB53-3C4F-4D81-A8C1-A108D130D14A}" type="datetimeFigureOut">
               <a:rPr lang="fr-FR" smtClean="0"/>
-              <a:t>08/01/2025</a:t>
+              <a:t>01/04/2026</a:t>
             </a:fld>
             <a:endParaRPr lang="fr-FR"/>
           </a:p>
@@ -2669,7 +2669,7 @@
           <a:p>
             <a:fld id="{92FCFB53-3C4F-4D81-A8C1-A108D130D14A}" type="datetimeFigureOut">
               <a:rPr lang="fr-FR" smtClean="0"/>
-              <a:t>08/01/2025</a:t>
+              <a:t>01/04/2026</a:t>
             </a:fld>
             <a:endParaRPr lang="fr-FR"/>
           </a:p>
@@ -2910,7 +2910,7 @@
           <a:p>
             <a:fld id="{92FCFB53-3C4F-4D81-A8C1-A108D130D14A}" type="datetimeFigureOut">
               <a:rPr lang="fr-FR" smtClean="0"/>
-              <a:t>08/01/2025</a:t>
+              <a:t>01/04/2026</a:t>
             </a:fld>
             <a:endParaRPr lang="fr-FR"/>
           </a:p>
@@ -3532,7 +3532,7 @@
                 <a:ea typeface="Verdana" panose="020B0604030504040204" pitchFamily="34" charset="0"/>
                 <a:cs typeface="Calibri" panose="020F0502020204030204" pitchFamily="34" charset="0"/>
               </a:rPr>
-              <a:t> 2.84 (2024-12-22)</a:t>
+              <a:t> 2.87 (2026-03-29)</a:t>
             </a:r>
           </a:p>
           <a:p>
@@ -3608,7 +3608,7 @@
                 <a:ea typeface="Verdana" panose="020B0604030504040204" pitchFamily="34" charset="0"/>
                 <a:cs typeface="Calibri" panose="020F0502020204030204" pitchFamily="34" charset="0"/>
               </a:rPr>
-              <a:t> 2023 canon &amp; </a:t>
+              <a:t> 2026 canon &amp; </a:t>
             </a:r>
             <a:r>
               <a:rPr lang="fr-FR" sz="1100" err="1">
